--- a/docs/pptx/carbo/ritu-carbo-linsubhr-egfrdisc-grade3.pptx
+++ b/docs/pptx/carbo/ritu-carbo-linsubhr-egfrdisc-grade3.pptx
@@ -2443,7 +2443,7 @@
           </p:nvSpPr>
           <p:spPr>
             <a:xfrm>
-              <a:off x="1810493" y="2073503"/>
+              <a:off x="1813815" y="2073503"/>
               <a:ext cx="0" cy="3649639"/>
             </a:xfrm>
             <a:custGeom>
@@ -2486,7 +2486,7 @@
           </p:nvSpPr>
           <p:spPr>
             <a:xfrm>
-              <a:off x="4291851" y="2073503"/>
+              <a:off x="4291714" y="2073503"/>
               <a:ext cx="0" cy="3649639"/>
             </a:xfrm>
             <a:custGeom>
@@ -2529,7 +2529,7 @@
           </p:nvSpPr>
           <p:spPr>
             <a:xfrm>
-              <a:off x="6773208" y="2073503"/>
+              <a:off x="6769614" y="2073503"/>
               <a:ext cx="0" cy="3649639"/>
             </a:xfrm>
             <a:custGeom>
@@ -2787,7 +2787,7 @@
           </p:nvSpPr>
           <p:spPr>
             <a:xfrm>
-              <a:off x="3051172" y="2073503"/>
+              <a:off x="3052764" y="2073503"/>
               <a:ext cx="0" cy="3649639"/>
             </a:xfrm>
             <a:custGeom>
@@ -2830,7 +2830,7 @@
           </p:nvSpPr>
           <p:spPr>
             <a:xfrm>
-              <a:off x="5532530" y="2073503"/>
+              <a:off x="5530664" y="2073503"/>
               <a:ext cx="0" cy="3649639"/>
             </a:xfrm>
             <a:custGeom>
@@ -2873,7 +2873,7 @@
           </p:nvSpPr>
           <p:spPr>
             <a:xfrm>
-              <a:off x="8013887" y="2073503"/>
+              <a:off x="8008563" y="2073503"/>
               <a:ext cx="0" cy="3649639"/>
             </a:xfrm>
             <a:custGeom>
@@ -2917,479 +2917,479 @@
           <p:spPr>
             <a:xfrm>
               <a:off x="1172049" y="2073503"/>
-              <a:ext cx="7090630" cy="3438788"/>
+              <a:ext cx="7090630" cy="3436659"/>
             </a:xfrm>
             <a:custGeom>
               <a:avLst/>
               <a:pathLst>
-                <a:path w="7090630" h="3438788">
+                <a:path w="7090630" h="3436659">
                   <a:moveTo>
-                    <a:pt x="3172651" y="0"/>
+                    <a:pt x="3181280" y="0"/>
                   </a:moveTo>
                   <a:lnTo>
-                    <a:pt x="3223013" y="191575"/>
-                  </a:lnTo>
-                  <a:lnTo>
-                    <a:pt x="3294636" y="443200"/>
-                  </a:lnTo>
-                  <a:lnTo>
-                    <a:pt x="3366258" y="675594"/>
-                  </a:lnTo>
-                  <a:lnTo>
-                    <a:pt x="3437881" y="890225"/>
-                  </a:lnTo>
-                  <a:lnTo>
-                    <a:pt x="3509503" y="1088452"/>
-                  </a:lnTo>
-                  <a:lnTo>
-                    <a:pt x="3581126" y="1271527"/>
-                  </a:lnTo>
-                  <a:lnTo>
-                    <a:pt x="3652748" y="1440611"/>
-                  </a:lnTo>
-                  <a:lnTo>
-                    <a:pt x="3724371" y="1596770"/>
-                  </a:lnTo>
-                  <a:lnTo>
-                    <a:pt x="3795993" y="1740995"/>
-                  </a:lnTo>
-                  <a:lnTo>
-                    <a:pt x="3867616" y="1874196"/>
-                  </a:lnTo>
-                  <a:lnTo>
-                    <a:pt x="3939238" y="1997216"/>
-                  </a:lnTo>
-                  <a:lnTo>
-                    <a:pt x="4010861" y="2110834"/>
-                  </a:lnTo>
-                  <a:lnTo>
-                    <a:pt x="4082483" y="2215767"/>
-                  </a:lnTo>
-                  <a:lnTo>
-                    <a:pt x="4154106" y="2312681"/>
-                  </a:lnTo>
-                  <a:lnTo>
-                    <a:pt x="4225729" y="2402187"/>
-                  </a:lnTo>
-                  <a:lnTo>
-                    <a:pt x="4297351" y="2484852"/>
-                  </a:lnTo>
-                  <a:lnTo>
-                    <a:pt x="4368974" y="2561199"/>
-                  </a:lnTo>
-                  <a:lnTo>
-                    <a:pt x="4440596" y="2631711"/>
-                  </a:lnTo>
-                  <a:lnTo>
-                    <a:pt x="4512219" y="2666731"/>
-                  </a:lnTo>
-                  <a:lnTo>
-                    <a:pt x="4583841" y="2685172"/>
-                  </a:lnTo>
-                  <a:lnTo>
-                    <a:pt x="4655464" y="2703197"/>
-                  </a:lnTo>
-                  <a:lnTo>
-                    <a:pt x="4727086" y="2720816"/>
-                  </a:lnTo>
-                  <a:lnTo>
-                    <a:pt x="4798709" y="2738036"/>
-                  </a:lnTo>
-                  <a:lnTo>
-                    <a:pt x="4870331" y="2754868"/>
-                  </a:lnTo>
-                  <a:lnTo>
-                    <a:pt x="4941954" y="2771320"/>
-                  </a:lnTo>
-                  <a:lnTo>
-                    <a:pt x="5013576" y="2787401"/>
-                  </a:lnTo>
-                  <a:lnTo>
-                    <a:pt x="5085199" y="2803118"/>
-                  </a:lnTo>
-                  <a:lnTo>
-                    <a:pt x="5156821" y="2818481"/>
-                  </a:lnTo>
-                  <a:lnTo>
-                    <a:pt x="5228444" y="2833497"/>
-                  </a:lnTo>
-                  <a:lnTo>
-                    <a:pt x="5300066" y="2848174"/>
-                  </a:lnTo>
-                  <a:lnTo>
-                    <a:pt x="5371689" y="2862520"/>
-                  </a:lnTo>
-                  <a:lnTo>
-                    <a:pt x="5443311" y="2876542"/>
-                  </a:lnTo>
-                  <a:lnTo>
-                    <a:pt x="5514934" y="2890248"/>
-                  </a:lnTo>
-                  <a:lnTo>
-                    <a:pt x="5586557" y="2903644"/>
-                  </a:lnTo>
-                  <a:lnTo>
-                    <a:pt x="5658179" y="2916738"/>
-                  </a:lnTo>
-                  <a:lnTo>
-                    <a:pt x="5729802" y="2929536"/>
-                  </a:lnTo>
-                  <a:lnTo>
-                    <a:pt x="5801424" y="2942046"/>
-                  </a:lnTo>
-                  <a:lnTo>
-                    <a:pt x="5873047" y="2954273"/>
-                  </a:lnTo>
-                  <a:lnTo>
-                    <a:pt x="5944669" y="2966224"/>
-                  </a:lnTo>
-                  <a:lnTo>
-                    <a:pt x="6016292" y="2977905"/>
-                  </a:lnTo>
-                  <a:lnTo>
-                    <a:pt x="6087914" y="2989323"/>
-                  </a:lnTo>
-                  <a:lnTo>
-                    <a:pt x="6159537" y="3000483"/>
-                  </a:lnTo>
-                  <a:lnTo>
-                    <a:pt x="6231159" y="3011391"/>
-                  </a:lnTo>
-                  <a:lnTo>
-                    <a:pt x="6302782" y="3022053"/>
-                  </a:lnTo>
-                  <a:lnTo>
-                    <a:pt x="6374404" y="3032474"/>
-                  </a:lnTo>
-                  <a:lnTo>
-                    <a:pt x="6446027" y="3042660"/>
-                  </a:lnTo>
-                  <a:lnTo>
-                    <a:pt x="6517649" y="3052616"/>
-                  </a:lnTo>
-                  <a:lnTo>
-                    <a:pt x="6589272" y="3062347"/>
-                  </a:lnTo>
-                  <a:lnTo>
-                    <a:pt x="6660894" y="3071859"/>
-                  </a:lnTo>
-                  <a:lnTo>
-                    <a:pt x="6732517" y="3081156"/>
-                  </a:lnTo>
-                  <a:lnTo>
-                    <a:pt x="6804139" y="3090243"/>
-                  </a:lnTo>
-                  <a:lnTo>
-                    <a:pt x="6875762" y="3099125"/>
-                  </a:lnTo>
-                  <a:lnTo>
-                    <a:pt x="6947385" y="3107806"/>
-                  </a:lnTo>
-                  <a:lnTo>
-                    <a:pt x="7019007" y="3116292"/>
-                  </a:lnTo>
-                  <a:lnTo>
-                    <a:pt x="7090630" y="3124586"/>
-                  </a:lnTo>
-                  <a:lnTo>
-                    <a:pt x="7090630" y="3438788"/>
-                  </a:lnTo>
-                  <a:lnTo>
-                    <a:pt x="7019007" y="3435067"/>
-                  </a:lnTo>
-                  <a:lnTo>
-                    <a:pt x="6947385" y="3431038"/>
-                  </a:lnTo>
-                  <a:lnTo>
-                    <a:pt x="6875762" y="3426676"/>
-                  </a:lnTo>
-                  <a:lnTo>
-                    <a:pt x="6804139" y="3421953"/>
-                  </a:lnTo>
-                  <a:lnTo>
-                    <a:pt x="6732517" y="3416840"/>
-                  </a:lnTo>
-                  <a:lnTo>
-                    <a:pt x="6660894" y="3411303"/>
-                  </a:lnTo>
-                  <a:lnTo>
-                    <a:pt x="6589272" y="3405307"/>
-                  </a:lnTo>
-                  <a:lnTo>
-                    <a:pt x="6517649" y="3398816"/>
-                  </a:lnTo>
-                  <a:lnTo>
-                    <a:pt x="6446027" y="3391788"/>
-                  </a:lnTo>
-                  <a:lnTo>
-                    <a:pt x="6374404" y="3384177"/>
-                  </a:lnTo>
-                  <a:lnTo>
-                    <a:pt x="6302782" y="3375937"/>
-                  </a:lnTo>
-                  <a:lnTo>
-                    <a:pt x="6231159" y="3367015"/>
-                  </a:lnTo>
-                  <a:lnTo>
-                    <a:pt x="6159537" y="3357355"/>
-                  </a:lnTo>
-                  <a:lnTo>
-                    <a:pt x="6087914" y="3346895"/>
-                  </a:lnTo>
-                  <a:lnTo>
-                    <a:pt x="6016292" y="3335570"/>
-                  </a:lnTo>
-                  <a:lnTo>
-                    <a:pt x="5944669" y="3323308"/>
-                  </a:lnTo>
-                  <a:lnTo>
-                    <a:pt x="5873047" y="3310030"/>
-                  </a:lnTo>
-                  <a:lnTo>
-                    <a:pt x="5801424" y="3295654"/>
-                  </a:lnTo>
-                  <a:lnTo>
-                    <a:pt x="5729802" y="3280088"/>
-                  </a:lnTo>
-                  <a:lnTo>
-                    <a:pt x="5658179" y="3263234"/>
-                  </a:lnTo>
-                  <a:lnTo>
-                    <a:pt x="5586557" y="3244985"/>
-                  </a:lnTo>
-                  <a:lnTo>
-                    <a:pt x="5514934" y="3225226"/>
-                  </a:lnTo>
-                  <a:lnTo>
-                    <a:pt x="5443311" y="3203832"/>
-                  </a:lnTo>
-                  <a:lnTo>
-                    <a:pt x="5371689" y="3180667"/>
-                  </a:lnTo>
-                  <a:lnTo>
-                    <a:pt x="5300066" y="3155585"/>
-                  </a:lnTo>
-                  <a:lnTo>
-                    <a:pt x="5228444" y="3128428"/>
-                  </a:lnTo>
-                  <a:lnTo>
-                    <a:pt x="5156821" y="3099023"/>
-                  </a:lnTo>
-                  <a:lnTo>
-                    <a:pt x="5085199" y="3067184"/>
-                  </a:lnTo>
-                  <a:lnTo>
-                    <a:pt x="5013576" y="3032711"/>
-                  </a:lnTo>
-                  <a:lnTo>
-                    <a:pt x="4941954" y="2995385"/>
-                  </a:lnTo>
-                  <a:lnTo>
-                    <a:pt x="4870331" y="2954969"/>
-                  </a:lnTo>
-                  <a:lnTo>
-                    <a:pt x="4798709" y="2911210"/>
-                  </a:lnTo>
-                  <a:lnTo>
-                    <a:pt x="4727086" y="2863828"/>
-                  </a:lnTo>
-                  <a:lnTo>
-                    <a:pt x="4655464" y="2812526"/>
-                  </a:lnTo>
-                  <a:lnTo>
-                    <a:pt x="4583841" y="2756978"/>
-                  </a:lnTo>
-                  <a:lnTo>
-                    <a:pt x="4512219" y="2696833"/>
-                  </a:lnTo>
-                  <a:lnTo>
-                    <a:pt x="4440596" y="2647864"/>
-                  </a:lnTo>
-                  <a:lnTo>
-                    <a:pt x="4368974" y="2628561"/>
-                  </a:lnTo>
-                  <a:lnTo>
-                    <a:pt x="4297351" y="2608812"/>
-                  </a:lnTo>
-                  <a:lnTo>
-                    <a:pt x="4225729" y="2588607"/>
-                  </a:lnTo>
-                  <a:lnTo>
-                    <a:pt x="4154106" y="2567936"/>
-                  </a:lnTo>
-                  <a:lnTo>
-                    <a:pt x="4082483" y="2546787"/>
-                  </a:lnTo>
-                  <a:lnTo>
-                    <a:pt x="4010861" y="2525150"/>
-                  </a:lnTo>
-                  <a:lnTo>
-                    <a:pt x="3939238" y="2503013"/>
-                  </a:lnTo>
-                  <a:lnTo>
-                    <a:pt x="3867616" y="2480365"/>
-                  </a:lnTo>
-                  <a:lnTo>
-                    <a:pt x="3795993" y="2457194"/>
-                  </a:lnTo>
-                  <a:lnTo>
-                    <a:pt x="3724371" y="2433488"/>
-                  </a:lnTo>
-                  <a:lnTo>
-                    <a:pt x="3652748" y="2409235"/>
-                  </a:lnTo>
-                  <a:lnTo>
-                    <a:pt x="3581126" y="2384421"/>
-                  </a:lnTo>
-                  <a:lnTo>
-                    <a:pt x="3509503" y="2359035"/>
-                  </a:lnTo>
-                  <a:lnTo>
-                    <a:pt x="3437881" y="2333062"/>
-                  </a:lnTo>
-                  <a:lnTo>
-                    <a:pt x="3366258" y="2306489"/>
-                  </a:lnTo>
-                  <a:lnTo>
-                    <a:pt x="3294636" y="2279303"/>
-                  </a:lnTo>
-                  <a:lnTo>
-                    <a:pt x="3223013" y="2251489"/>
-                  </a:lnTo>
-                  <a:lnTo>
-                    <a:pt x="3151391" y="2223033"/>
-                  </a:lnTo>
-                  <a:lnTo>
-                    <a:pt x="3079768" y="2193919"/>
-                  </a:lnTo>
-                  <a:lnTo>
-                    <a:pt x="3008146" y="2164133"/>
-                  </a:lnTo>
-                  <a:lnTo>
-                    <a:pt x="2936523" y="2133660"/>
-                  </a:lnTo>
-                  <a:lnTo>
-                    <a:pt x="2864901" y="2102482"/>
-                  </a:lnTo>
-                  <a:lnTo>
-                    <a:pt x="2793278" y="2070585"/>
-                  </a:lnTo>
-                  <a:lnTo>
-                    <a:pt x="2721655" y="2037951"/>
-                  </a:lnTo>
-                  <a:lnTo>
-                    <a:pt x="2650033" y="2004564"/>
-                  </a:lnTo>
-                  <a:lnTo>
-                    <a:pt x="2578410" y="1970405"/>
-                  </a:lnTo>
-                  <a:lnTo>
-                    <a:pt x="2506788" y="1935458"/>
-                  </a:lnTo>
-                  <a:lnTo>
-                    <a:pt x="2435165" y="1899703"/>
-                  </a:lnTo>
-                  <a:lnTo>
-                    <a:pt x="2363543" y="1863123"/>
-                  </a:lnTo>
-                  <a:lnTo>
-                    <a:pt x="2291920" y="1825698"/>
-                  </a:lnTo>
-                  <a:lnTo>
-                    <a:pt x="2220298" y="1787409"/>
-                  </a:lnTo>
-                  <a:lnTo>
-                    <a:pt x="2148675" y="1748236"/>
-                  </a:lnTo>
-                  <a:lnTo>
-                    <a:pt x="2077053" y="1708158"/>
-                  </a:lnTo>
-                  <a:lnTo>
-                    <a:pt x="2005430" y="1667154"/>
-                  </a:lnTo>
-                  <a:lnTo>
-                    <a:pt x="1933808" y="1625204"/>
-                  </a:lnTo>
-                  <a:lnTo>
-                    <a:pt x="1862185" y="1582285"/>
-                  </a:lnTo>
-                  <a:lnTo>
-                    <a:pt x="1790563" y="1538375"/>
-                  </a:lnTo>
-                  <a:lnTo>
-                    <a:pt x="1718940" y="1493451"/>
-                  </a:lnTo>
-                  <a:lnTo>
-                    <a:pt x="1647318" y="1447489"/>
-                  </a:lnTo>
-                  <a:lnTo>
-                    <a:pt x="1575695" y="1400466"/>
-                  </a:lnTo>
-                  <a:lnTo>
-                    <a:pt x="1504073" y="1352357"/>
-                  </a:lnTo>
-                  <a:lnTo>
-                    <a:pt x="1432450" y="1303137"/>
-                  </a:lnTo>
-                  <a:lnTo>
-                    <a:pt x="1360827" y="1252781"/>
-                  </a:lnTo>
-                  <a:lnTo>
-                    <a:pt x="1289205" y="1201261"/>
-                  </a:lnTo>
-                  <a:lnTo>
-                    <a:pt x="1217582" y="1148552"/>
-                  </a:lnTo>
-                  <a:lnTo>
-                    <a:pt x="1145960" y="1094626"/>
-                  </a:lnTo>
-                  <a:lnTo>
-                    <a:pt x="1074337" y="1039454"/>
-                  </a:lnTo>
-                  <a:lnTo>
-                    <a:pt x="1002715" y="983008"/>
-                  </a:lnTo>
-                  <a:lnTo>
-                    <a:pt x="931092" y="925259"/>
-                  </a:lnTo>
-                  <a:lnTo>
-                    <a:pt x="859470" y="866176"/>
-                  </a:lnTo>
-                  <a:lnTo>
-                    <a:pt x="787847" y="805729"/>
-                  </a:lnTo>
-                  <a:lnTo>
-                    <a:pt x="716225" y="743886"/>
-                  </a:lnTo>
-                  <a:lnTo>
-                    <a:pt x="644602" y="680615"/>
-                  </a:lnTo>
-                  <a:lnTo>
-                    <a:pt x="572980" y="615883"/>
-                  </a:lnTo>
-                  <a:lnTo>
-                    <a:pt x="501357" y="549655"/>
-                  </a:lnTo>
-                  <a:lnTo>
-                    <a:pt x="429735" y="481899"/>
-                  </a:lnTo>
-                  <a:lnTo>
-                    <a:pt x="358112" y="412578"/>
-                  </a:lnTo>
-                  <a:lnTo>
-                    <a:pt x="286490" y="341655"/>
-                  </a:lnTo>
-                  <a:lnTo>
-                    <a:pt x="214867" y="269096"/>
-                  </a:lnTo>
-                  <a:lnTo>
-                    <a:pt x="143245" y="194860"/>
-                  </a:lnTo>
-                  <a:lnTo>
-                    <a:pt x="71622" y="118910"/>
-                  </a:lnTo>
-                  <a:lnTo>
-                    <a:pt x="0" y="41207"/>
+                    <a:pt x="3223013" y="158913"/>
+                  </a:lnTo>
+                  <a:lnTo>
+                    <a:pt x="3294636" y="410965"/>
+                  </a:lnTo>
+                  <a:lnTo>
+                    <a:pt x="3366258" y="643910"/>
+                  </a:lnTo>
+                  <a:lnTo>
+                    <a:pt x="3437881" y="859196"/>
+                  </a:lnTo>
+                  <a:lnTo>
+                    <a:pt x="3509503" y="1058161"/>
+                  </a:lnTo>
+                  <a:lnTo>
+                    <a:pt x="3581126" y="1242042"/>
+                  </a:lnTo>
+                  <a:lnTo>
+                    <a:pt x="3652748" y="1411984"/>
+                  </a:lnTo>
+                  <a:lnTo>
+                    <a:pt x="3724371" y="1569042"/>
+                  </a:lnTo>
+                  <a:lnTo>
+                    <a:pt x="3795993" y="1714194"/>
+                  </a:lnTo>
+                  <a:lnTo>
+                    <a:pt x="3867616" y="1848343"/>
+                  </a:lnTo>
+                  <a:lnTo>
+                    <a:pt x="3939238" y="1972321"/>
+                  </a:lnTo>
+                  <a:lnTo>
+                    <a:pt x="4010861" y="2086901"/>
+                  </a:lnTo>
+                  <a:lnTo>
+                    <a:pt x="4082483" y="2192795"/>
+                  </a:lnTo>
+                  <a:lnTo>
+                    <a:pt x="4154106" y="2290661"/>
+                  </a:lnTo>
+                  <a:lnTo>
+                    <a:pt x="4225729" y="2381107"/>
+                  </a:lnTo>
+                  <a:lnTo>
+                    <a:pt x="4297351" y="2464698"/>
+                  </a:lnTo>
+                  <a:lnTo>
+                    <a:pt x="4368974" y="2541951"/>
+                  </a:lnTo>
+                  <a:lnTo>
+                    <a:pt x="4440596" y="2613347"/>
+                  </a:lnTo>
+                  <a:lnTo>
+                    <a:pt x="4512219" y="2661597"/>
+                  </a:lnTo>
+                  <a:lnTo>
+                    <a:pt x="4583841" y="2680106"/>
+                  </a:lnTo>
+                  <a:lnTo>
+                    <a:pt x="4655464" y="2698198"/>
+                  </a:lnTo>
+                  <a:lnTo>
+                    <a:pt x="4727086" y="2715883"/>
+                  </a:lnTo>
+                  <a:lnTo>
+                    <a:pt x="4798709" y="2733170"/>
+                  </a:lnTo>
+                  <a:lnTo>
+                    <a:pt x="4870331" y="2750067"/>
+                  </a:lnTo>
+                  <a:lnTo>
+                    <a:pt x="4941954" y="2766585"/>
+                  </a:lnTo>
+                  <a:lnTo>
+                    <a:pt x="5013576" y="2782730"/>
+                  </a:lnTo>
+                  <a:lnTo>
+                    <a:pt x="5085199" y="2798512"/>
+                  </a:lnTo>
+                  <a:lnTo>
+                    <a:pt x="5156821" y="2813939"/>
+                  </a:lnTo>
+                  <a:lnTo>
+                    <a:pt x="5228444" y="2829018"/>
+                  </a:lnTo>
+                  <a:lnTo>
+                    <a:pt x="5300066" y="2843758"/>
+                  </a:lnTo>
+                  <a:lnTo>
+                    <a:pt x="5371689" y="2858166"/>
+                  </a:lnTo>
+                  <a:lnTo>
+                    <a:pt x="5443311" y="2872249"/>
+                  </a:lnTo>
+                  <a:lnTo>
+                    <a:pt x="5514934" y="2886016"/>
+                  </a:lnTo>
+                  <a:lnTo>
+                    <a:pt x="5586557" y="2899473"/>
+                  </a:lnTo>
+                  <a:lnTo>
+                    <a:pt x="5658179" y="2912626"/>
+                  </a:lnTo>
+                  <a:lnTo>
+                    <a:pt x="5729802" y="2925484"/>
+                  </a:lnTo>
+                  <a:lnTo>
+                    <a:pt x="5801424" y="2938052"/>
+                  </a:lnTo>
+                  <a:lnTo>
+                    <a:pt x="5873047" y="2950337"/>
+                  </a:lnTo>
+                  <a:lnTo>
+                    <a:pt x="5944669" y="2962346"/>
+                  </a:lnTo>
+                  <a:lnTo>
+                    <a:pt x="6016292" y="2974084"/>
+                  </a:lnTo>
+                  <a:lnTo>
+                    <a:pt x="6087914" y="2985558"/>
+                  </a:lnTo>
+                  <a:lnTo>
+                    <a:pt x="6159537" y="2996774"/>
+                  </a:lnTo>
+                  <a:lnTo>
+                    <a:pt x="6231159" y="3007737"/>
+                  </a:lnTo>
+                  <a:lnTo>
+                    <a:pt x="6302782" y="3018453"/>
+                  </a:lnTo>
+                  <a:lnTo>
+                    <a:pt x="6374404" y="3028928"/>
+                  </a:lnTo>
+                  <a:lnTo>
+                    <a:pt x="6446027" y="3039168"/>
+                  </a:lnTo>
+                  <a:lnTo>
+                    <a:pt x="6517649" y="3049176"/>
+                  </a:lnTo>
+                  <a:lnTo>
+                    <a:pt x="6589272" y="3058960"/>
+                  </a:lnTo>
+                  <a:lnTo>
+                    <a:pt x="6660894" y="3068523"/>
+                  </a:lnTo>
+                  <a:lnTo>
+                    <a:pt x="6732517" y="3077871"/>
+                  </a:lnTo>
+                  <a:lnTo>
+                    <a:pt x="6804139" y="3087008"/>
+                  </a:lnTo>
+                  <a:lnTo>
+                    <a:pt x="6875762" y="3095940"/>
+                  </a:lnTo>
+                  <a:lnTo>
+                    <a:pt x="6947385" y="3104671"/>
+                  </a:lnTo>
+                  <a:lnTo>
+                    <a:pt x="7019007" y="3113205"/>
+                  </a:lnTo>
+                  <a:lnTo>
+                    <a:pt x="7090630" y="3121547"/>
+                  </a:lnTo>
+                  <a:lnTo>
+                    <a:pt x="7090630" y="3436659"/>
+                  </a:lnTo>
+                  <a:lnTo>
+                    <a:pt x="7019007" y="3432797"/>
+                  </a:lnTo>
+                  <a:lnTo>
+                    <a:pt x="6947385" y="3428618"/>
+                  </a:lnTo>
+                  <a:lnTo>
+                    <a:pt x="6875762" y="3424096"/>
+                  </a:lnTo>
+                  <a:lnTo>
+                    <a:pt x="6804139" y="3419203"/>
+                  </a:lnTo>
+                  <a:lnTo>
+                    <a:pt x="6732517" y="3413908"/>
+                  </a:lnTo>
+                  <a:lnTo>
+                    <a:pt x="6660894" y="3408180"/>
+                  </a:lnTo>
+                  <a:lnTo>
+                    <a:pt x="6589272" y="3401981"/>
+                  </a:lnTo>
+                  <a:lnTo>
+                    <a:pt x="6517649" y="3395274"/>
+                  </a:lnTo>
+                  <a:lnTo>
+                    <a:pt x="6446027" y="3388017"/>
+                  </a:lnTo>
+                  <a:lnTo>
+                    <a:pt x="6374404" y="3380165"/>
+                  </a:lnTo>
+                  <a:lnTo>
+                    <a:pt x="6302782" y="3371668"/>
+                  </a:lnTo>
+                  <a:lnTo>
+                    <a:pt x="6231159" y="3362475"/>
+                  </a:lnTo>
+                  <a:lnTo>
+                    <a:pt x="6159537" y="3352527"/>
+                  </a:lnTo>
+                  <a:lnTo>
+                    <a:pt x="6087914" y="3341763"/>
+                  </a:lnTo>
+                  <a:lnTo>
+                    <a:pt x="6016292" y="3330117"/>
+                  </a:lnTo>
+                  <a:lnTo>
+                    <a:pt x="5944669" y="3317515"/>
+                  </a:lnTo>
+                  <a:lnTo>
+                    <a:pt x="5873047" y="3303879"/>
+                  </a:lnTo>
+                  <a:lnTo>
+                    <a:pt x="5801424" y="3289125"/>
+                  </a:lnTo>
+                  <a:lnTo>
+                    <a:pt x="5729802" y="3273161"/>
+                  </a:lnTo>
+                  <a:lnTo>
+                    <a:pt x="5658179" y="3255887"/>
+                  </a:lnTo>
+                  <a:lnTo>
+                    <a:pt x="5586557" y="3237196"/>
+                  </a:lnTo>
+                  <a:lnTo>
+                    <a:pt x="5514934" y="3216972"/>
+                  </a:lnTo>
+                  <a:lnTo>
+                    <a:pt x="5443311" y="3195090"/>
+                  </a:lnTo>
+                  <a:lnTo>
+                    <a:pt x="5371689" y="3171412"/>
+                  </a:lnTo>
+                  <a:lnTo>
+                    <a:pt x="5300066" y="3145792"/>
+                  </a:lnTo>
+                  <a:lnTo>
+                    <a:pt x="5228444" y="3118070"/>
+                  </a:lnTo>
+                  <a:lnTo>
+                    <a:pt x="5156821" y="3088075"/>
+                  </a:lnTo>
+                  <a:lnTo>
+                    <a:pt x="5085199" y="3055619"/>
+                  </a:lnTo>
+                  <a:lnTo>
+                    <a:pt x="5013576" y="3020500"/>
+                  </a:lnTo>
+                  <a:lnTo>
+                    <a:pt x="4941954" y="2982501"/>
+                  </a:lnTo>
+                  <a:lnTo>
+                    <a:pt x="4870331" y="2941385"/>
+                  </a:lnTo>
+                  <a:lnTo>
+                    <a:pt x="4798709" y="2896897"/>
+                  </a:lnTo>
+                  <a:lnTo>
+                    <a:pt x="4727086" y="2848759"/>
+                  </a:lnTo>
+                  <a:lnTo>
+                    <a:pt x="4655464" y="2796673"/>
+                  </a:lnTo>
+                  <a:lnTo>
+                    <a:pt x="4583841" y="2740314"/>
+                  </a:lnTo>
+                  <a:lnTo>
+                    <a:pt x="4512219" y="2679332"/>
+                  </a:lnTo>
+                  <a:lnTo>
+                    <a:pt x="4440596" y="2642661"/>
+                  </a:lnTo>
+                  <a:lnTo>
+                    <a:pt x="4368974" y="2623290"/>
+                  </a:lnTo>
+                  <a:lnTo>
+                    <a:pt x="4297351" y="2603473"/>
+                  </a:lnTo>
+                  <a:lnTo>
+                    <a:pt x="4225729" y="2583199"/>
+                  </a:lnTo>
+                  <a:lnTo>
+                    <a:pt x="4154106" y="2562458"/>
+                  </a:lnTo>
+                  <a:lnTo>
+                    <a:pt x="4082483" y="2541239"/>
+                  </a:lnTo>
+                  <a:lnTo>
+                    <a:pt x="4010861" y="2519532"/>
+                  </a:lnTo>
+                  <a:lnTo>
+                    <a:pt x="3939238" y="2497325"/>
+                  </a:lnTo>
+                  <a:lnTo>
+                    <a:pt x="3867616" y="2474606"/>
+                  </a:lnTo>
+                  <a:lnTo>
+                    <a:pt x="3795993" y="2451364"/>
+                  </a:lnTo>
+                  <a:lnTo>
+                    <a:pt x="3724371" y="2427587"/>
+                  </a:lnTo>
+                  <a:lnTo>
+                    <a:pt x="3652748" y="2403262"/>
+                  </a:lnTo>
+                  <a:lnTo>
+                    <a:pt x="3581126" y="2378377"/>
+                  </a:lnTo>
+                  <a:lnTo>
+                    <a:pt x="3509503" y="2352919"/>
+                  </a:lnTo>
+                  <a:lnTo>
+                    <a:pt x="3437881" y="2326874"/>
+                  </a:lnTo>
+                  <a:lnTo>
+                    <a:pt x="3366258" y="2300230"/>
+                  </a:lnTo>
+                  <a:lnTo>
+                    <a:pt x="3294636" y="2272972"/>
+                  </a:lnTo>
+                  <a:lnTo>
+                    <a:pt x="3223013" y="2245086"/>
+                  </a:lnTo>
+                  <a:lnTo>
+                    <a:pt x="3151391" y="2216558"/>
+                  </a:lnTo>
+                  <a:lnTo>
+                    <a:pt x="3079768" y="2187373"/>
+                  </a:lnTo>
+                  <a:lnTo>
+                    <a:pt x="3008146" y="2157515"/>
+                  </a:lnTo>
+                  <a:lnTo>
+                    <a:pt x="2936523" y="2126970"/>
+                  </a:lnTo>
+                  <a:lnTo>
+                    <a:pt x="2864901" y="2095722"/>
+                  </a:lnTo>
+                  <a:lnTo>
+                    <a:pt x="2793278" y="2063754"/>
+                  </a:lnTo>
+                  <a:lnTo>
+                    <a:pt x="2721655" y="2031049"/>
+                  </a:lnTo>
+                  <a:lnTo>
+                    <a:pt x="2650033" y="1997592"/>
+                  </a:lnTo>
+                  <a:lnTo>
+                    <a:pt x="2578410" y="1963363"/>
+                  </a:lnTo>
+                  <a:lnTo>
+                    <a:pt x="2506788" y="1928347"/>
+                  </a:lnTo>
+                  <a:lnTo>
+                    <a:pt x="2435165" y="1892524"/>
+                  </a:lnTo>
+                  <a:lnTo>
+                    <a:pt x="2363543" y="1855876"/>
+                  </a:lnTo>
+                  <a:lnTo>
+                    <a:pt x="2291920" y="1818383"/>
+                  </a:lnTo>
+                  <a:lnTo>
+                    <a:pt x="2220298" y="1780028"/>
+                  </a:lnTo>
+                  <a:lnTo>
+                    <a:pt x="2148675" y="1740789"/>
+                  </a:lnTo>
+                  <a:lnTo>
+                    <a:pt x="2077053" y="1700646"/>
+                  </a:lnTo>
+                  <a:lnTo>
+                    <a:pt x="2005430" y="1659579"/>
+                  </a:lnTo>
+                  <a:lnTo>
+                    <a:pt x="1933808" y="1617566"/>
+                  </a:lnTo>
+                  <a:lnTo>
+                    <a:pt x="1862185" y="1574585"/>
+                  </a:lnTo>
+                  <a:lnTo>
+                    <a:pt x="1790563" y="1530614"/>
+                  </a:lnTo>
+                  <a:lnTo>
+                    <a:pt x="1718940" y="1485631"/>
+                  </a:lnTo>
+                  <a:lnTo>
+                    <a:pt x="1647318" y="1439611"/>
+                  </a:lnTo>
+                  <a:lnTo>
+                    <a:pt x="1575695" y="1392532"/>
+                  </a:lnTo>
+                  <a:lnTo>
+                    <a:pt x="1504073" y="1344368"/>
+                  </a:lnTo>
+                  <a:lnTo>
+                    <a:pt x="1432450" y="1295095"/>
+                  </a:lnTo>
+                  <a:lnTo>
+                    <a:pt x="1360827" y="1244688"/>
+                  </a:lnTo>
+                  <a:lnTo>
+                    <a:pt x="1289205" y="1193119"/>
+                  </a:lnTo>
+                  <a:lnTo>
+                    <a:pt x="1217582" y="1140363"/>
+                  </a:lnTo>
+                  <a:lnTo>
+                    <a:pt x="1145960" y="1086391"/>
+                  </a:lnTo>
+                  <a:lnTo>
+                    <a:pt x="1074337" y="1031177"/>
+                  </a:lnTo>
+                  <a:lnTo>
+                    <a:pt x="1002715" y="974691"/>
+                  </a:lnTo>
+                  <a:lnTo>
+                    <a:pt x="931092" y="916904"/>
+                  </a:lnTo>
+                  <a:lnTo>
+                    <a:pt x="859470" y="857786"/>
+                  </a:lnTo>
+                  <a:lnTo>
+                    <a:pt x="787847" y="797306"/>
+                  </a:lnTo>
+                  <a:lnTo>
+                    <a:pt x="716225" y="735434"/>
+                  </a:lnTo>
+                  <a:lnTo>
+                    <a:pt x="644602" y="672136"/>
+                  </a:lnTo>
+                  <a:lnTo>
+                    <a:pt x="572980" y="607381"/>
+                  </a:lnTo>
+                  <a:lnTo>
+                    <a:pt x="501357" y="541134"/>
+                  </a:lnTo>
+                  <a:lnTo>
+                    <a:pt x="429735" y="473361"/>
+                  </a:lnTo>
+                  <a:lnTo>
+                    <a:pt x="358112" y="404028"/>
+                  </a:lnTo>
+                  <a:lnTo>
+                    <a:pt x="286490" y="333098"/>
+                  </a:lnTo>
+                  <a:lnTo>
+                    <a:pt x="214867" y="260534"/>
+                  </a:lnTo>
+                  <a:lnTo>
+                    <a:pt x="143245" y="186299"/>
+                  </a:lnTo>
+                  <a:lnTo>
+                    <a:pt x="71622" y="110354"/>
+                  </a:lnTo>
+                  <a:lnTo>
+                    <a:pt x="0" y="32660"/>
                   </a:lnTo>
                   <a:lnTo>
                     <a:pt x="0" y="0"/>
@@ -3418,180 +3418,180 @@
           </p:nvSpPr>
           <p:spPr>
             <a:xfrm>
-              <a:off x="4344700" y="2073503"/>
-              <a:ext cx="3917978" cy="3124586"/>
+              <a:off x="4353330" y="2073503"/>
+              <a:ext cx="3909349" cy="3121547"/>
             </a:xfrm>
             <a:custGeom>
               <a:avLst/>
               <a:pathLst>
-                <a:path w="3917978" h="3124586">
+                <a:path w="3909349" h="3121547">
                   <a:moveTo>
                     <a:pt x="0" y="0"/>
                   </a:moveTo>
                   <a:lnTo>
-                    <a:pt x="50362" y="191575"/>
-                  </a:lnTo>
-                  <a:lnTo>
-                    <a:pt x="121984" y="443200"/>
-                  </a:lnTo>
-                  <a:lnTo>
-                    <a:pt x="193607" y="675594"/>
-                  </a:lnTo>
-                  <a:lnTo>
-                    <a:pt x="265229" y="890225"/>
-                  </a:lnTo>
-                  <a:lnTo>
-                    <a:pt x="336852" y="1088452"/>
-                  </a:lnTo>
-                  <a:lnTo>
-                    <a:pt x="408474" y="1271527"/>
-                  </a:lnTo>
-                  <a:lnTo>
-                    <a:pt x="480097" y="1440611"/>
-                  </a:lnTo>
-                  <a:lnTo>
-                    <a:pt x="551719" y="1596770"/>
-                  </a:lnTo>
-                  <a:lnTo>
-                    <a:pt x="623342" y="1740995"/>
-                  </a:lnTo>
-                  <a:lnTo>
-                    <a:pt x="694964" y="1874196"/>
-                  </a:lnTo>
-                  <a:lnTo>
-                    <a:pt x="766587" y="1997216"/>
-                  </a:lnTo>
-                  <a:lnTo>
-                    <a:pt x="838209" y="2110834"/>
-                  </a:lnTo>
-                  <a:lnTo>
-                    <a:pt x="909832" y="2215767"/>
-                  </a:lnTo>
-                  <a:lnTo>
-                    <a:pt x="981454" y="2312681"/>
-                  </a:lnTo>
-                  <a:lnTo>
-                    <a:pt x="1053077" y="2402187"/>
-                  </a:lnTo>
-                  <a:lnTo>
-                    <a:pt x="1124700" y="2484852"/>
-                  </a:lnTo>
-                  <a:lnTo>
-                    <a:pt x="1196322" y="2561199"/>
-                  </a:lnTo>
-                  <a:lnTo>
-                    <a:pt x="1267945" y="2631711"/>
-                  </a:lnTo>
-                  <a:lnTo>
-                    <a:pt x="1339567" y="2666731"/>
-                  </a:lnTo>
-                  <a:lnTo>
-                    <a:pt x="1411190" y="2685172"/>
-                  </a:lnTo>
-                  <a:lnTo>
-                    <a:pt x="1482812" y="2703197"/>
-                  </a:lnTo>
-                  <a:lnTo>
-                    <a:pt x="1554435" y="2720816"/>
-                  </a:lnTo>
-                  <a:lnTo>
-                    <a:pt x="1626057" y="2738036"/>
-                  </a:lnTo>
-                  <a:lnTo>
-                    <a:pt x="1697680" y="2754868"/>
-                  </a:lnTo>
-                  <a:lnTo>
-                    <a:pt x="1769302" y="2771320"/>
-                  </a:lnTo>
-                  <a:lnTo>
-                    <a:pt x="1840925" y="2787401"/>
-                  </a:lnTo>
-                  <a:lnTo>
-                    <a:pt x="1912547" y="2803118"/>
-                  </a:lnTo>
-                  <a:lnTo>
-                    <a:pt x="1984170" y="2818481"/>
-                  </a:lnTo>
-                  <a:lnTo>
-                    <a:pt x="2055792" y="2833497"/>
-                  </a:lnTo>
-                  <a:lnTo>
-                    <a:pt x="2127415" y="2848174"/>
-                  </a:lnTo>
-                  <a:lnTo>
-                    <a:pt x="2199037" y="2862520"/>
-                  </a:lnTo>
-                  <a:lnTo>
-                    <a:pt x="2270660" y="2876542"/>
-                  </a:lnTo>
-                  <a:lnTo>
-                    <a:pt x="2342282" y="2890248"/>
-                  </a:lnTo>
-                  <a:lnTo>
-                    <a:pt x="2413905" y="2903644"/>
-                  </a:lnTo>
-                  <a:lnTo>
-                    <a:pt x="2485528" y="2916738"/>
-                  </a:lnTo>
-                  <a:lnTo>
-                    <a:pt x="2557150" y="2929536"/>
-                  </a:lnTo>
-                  <a:lnTo>
-                    <a:pt x="2628773" y="2942046"/>
-                  </a:lnTo>
-                  <a:lnTo>
-                    <a:pt x="2700395" y="2954273"/>
-                  </a:lnTo>
-                  <a:lnTo>
-                    <a:pt x="2772018" y="2966224"/>
-                  </a:lnTo>
-                  <a:lnTo>
-                    <a:pt x="2843640" y="2977905"/>
-                  </a:lnTo>
-                  <a:lnTo>
-                    <a:pt x="2915263" y="2989323"/>
-                  </a:lnTo>
-                  <a:lnTo>
-                    <a:pt x="2986885" y="3000483"/>
-                  </a:lnTo>
-                  <a:lnTo>
-                    <a:pt x="3058508" y="3011391"/>
-                  </a:lnTo>
-                  <a:lnTo>
-                    <a:pt x="3130130" y="3022053"/>
-                  </a:lnTo>
-                  <a:lnTo>
-                    <a:pt x="3201753" y="3032474"/>
-                  </a:lnTo>
-                  <a:lnTo>
-                    <a:pt x="3273375" y="3042660"/>
-                  </a:lnTo>
-                  <a:lnTo>
-                    <a:pt x="3344998" y="3052616"/>
-                  </a:lnTo>
-                  <a:lnTo>
-                    <a:pt x="3416620" y="3062347"/>
-                  </a:lnTo>
-                  <a:lnTo>
-                    <a:pt x="3488243" y="3071859"/>
-                  </a:lnTo>
-                  <a:lnTo>
-                    <a:pt x="3559865" y="3081156"/>
-                  </a:lnTo>
-                  <a:lnTo>
-                    <a:pt x="3631488" y="3090243"/>
-                  </a:lnTo>
-                  <a:lnTo>
-                    <a:pt x="3703110" y="3099125"/>
-                  </a:lnTo>
-                  <a:lnTo>
-                    <a:pt x="3774733" y="3107806"/>
-                  </a:lnTo>
-                  <a:lnTo>
-                    <a:pt x="3846356" y="3116292"/>
-                  </a:lnTo>
-                  <a:lnTo>
-                    <a:pt x="3917978" y="3124586"/>
+                    <a:pt x="41732" y="158913"/>
+                  </a:lnTo>
+                  <a:lnTo>
+                    <a:pt x="113355" y="410965"/>
+                  </a:lnTo>
+                  <a:lnTo>
+                    <a:pt x="184978" y="643910"/>
+                  </a:lnTo>
+                  <a:lnTo>
+                    <a:pt x="256600" y="859196"/>
+                  </a:lnTo>
+                  <a:lnTo>
+                    <a:pt x="328223" y="1058161"/>
+                  </a:lnTo>
+                  <a:lnTo>
+                    <a:pt x="399845" y="1242042"/>
+                  </a:lnTo>
+                  <a:lnTo>
+                    <a:pt x="471468" y="1411984"/>
+                  </a:lnTo>
+                  <a:lnTo>
+                    <a:pt x="543090" y="1569042"/>
+                  </a:lnTo>
+                  <a:lnTo>
+                    <a:pt x="614713" y="1714194"/>
+                  </a:lnTo>
+                  <a:lnTo>
+                    <a:pt x="686335" y="1848343"/>
+                  </a:lnTo>
+                  <a:lnTo>
+                    <a:pt x="757958" y="1972321"/>
+                  </a:lnTo>
+                  <a:lnTo>
+                    <a:pt x="829580" y="2086901"/>
+                  </a:lnTo>
+                  <a:lnTo>
+                    <a:pt x="901203" y="2192795"/>
+                  </a:lnTo>
+                  <a:lnTo>
+                    <a:pt x="972825" y="2290661"/>
+                  </a:lnTo>
+                  <a:lnTo>
+                    <a:pt x="1044448" y="2381107"/>
+                  </a:lnTo>
+                  <a:lnTo>
+                    <a:pt x="1116070" y="2464698"/>
+                  </a:lnTo>
+                  <a:lnTo>
+                    <a:pt x="1187693" y="2541951"/>
+                  </a:lnTo>
+                  <a:lnTo>
+                    <a:pt x="1259315" y="2613347"/>
+                  </a:lnTo>
+                  <a:lnTo>
+                    <a:pt x="1330938" y="2661597"/>
+                  </a:lnTo>
+                  <a:lnTo>
+                    <a:pt x="1402560" y="2680106"/>
+                  </a:lnTo>
+                  <a:lnTo>
+                    <a:pt x="1474183" y="2698198"/>
+                  </a:lnTo>
+                  <a:lnTo>
+                    <a:pt x="1545806" y="2715883"/>
+                  </a:lnTo>
+                  <a:lnTo>
+                    <a:pt x="1617428" y="2733170"/>
+                  </a:lnTo>
+                  <a:lnTo>
+                    <a:pt x="1689051" y="2750067"/>
+                  </a:lnTo>
+                  <a:lnTo>
+                    <a:pt x="1760673" y="2766585"/>
+                  </a:lnTo>
+                  <a:lnTo>
+                    <a:pt x="1832296" y="2782730"/>
+                  </a:lnTo>
+                  <a:lnTo>
+                    <a:pt x="1903918" y="2798512"/>
+                  </a:lnTo>
+                  <a:lnTo>
+                    <a:pt x="1975541" y="2813939"/>
+                  </a:lnTo>
+                  <a:lnTo>
+                    <a:pt x="2047163" y="2829018"/>
+                  </a:lnTo>
+                  <a:lnTo>
+                    <a:pt x="2118786" y="2843758"/>
+                  </a:lnTo>
+                  <a:lnTo>
+                    <a:pt x="2190408" y="2858166"/>
+                  </a:lnTo>
+                  <a:lnTo>
+                    <a:pt x="2262031" y="2872249"/>
+                  </a:lnTo>
+                  <a:lnTo>
+                    <a:pt x="2333653" y="2886016"/>
+                  </a:lnTo>
+                  <a:lnTo>
+                    <a:pt x="2405276" y="2899473"/>
+                  </a:lnTo>
+                  <a:lnTo>
+                    <a:pt x="2476898" y="2912626"/>
+                  </a:lnTo>
+                  <a:lnTo>
+                    <a:pt x="2548521" y="2925484"/>
+                  </a:lnTo>
+                  <a:lnTo>
+                    <a:pt x="2620143" y="2938052"/>
+                  </a:lnTo>
+                  <a:lnTo>
+                    <a:pt x="2691766" y="2950337"/>
+                  </a:lnTo>
+                  <a:lnTo>
+                    <a:pt x="2763388" y="2962346"/>
+                  </a:lnTo>
+                  <a:lnTo>
+                    <a:pt x="2835011" y="2974084"/>
+                  </a:lnTo>
+                  <a:lnTo>
+                    <a:pt x="2906634" y="2985558"/>
+                  </a:lnTo>
+                  <a:lnTo>
+                    <a:pt x="2978256" y="2996774"/>
+                  </a:lnTo>
+                  <a:lnTo>
+                    <a:pt x="3049879" y="3007737"/>
+                  </a:lnTo>
+                  <a:lnTo>
+                    <a:pt x="3121501" y="3018453"/>
+                  </a:lnTo>
+                  <a:lnTo>
+                    <a:pt x="3193124" y="3028928"/>
+                  </a:lnTo>
+                  <a:lnTo>
+                    <a:pt x="3264746" y="3039168"/>
+                  </a:lnTo>
+                  <a:lnTo>
+                    <a:pt x="3336369" y="3049176"/>
+                  </a:lnTo>
+                  <a:lnTo>
+                    <a:pt x="3407991" y="3058960"/>
+                  </a:lnTo>
+                  <a:lnTo>
+                    <a:pt x="3479614" y="3068523"/>
+                  </a:lnTo>
+                  <a:lnTo>
+                    <a:pt x="3551236" y="3077871"/>
+                  </a:lnTo>
+                  <a:lnTo>
+                    <a:pt x="3622859" y="3087008"/>
+                  </a:lnTo>
+                  <a:lnTo>
+                    <a:pt x="3694481" y="3095940"/>
+                  </a:lnTo>
+                  <a:lnTo>
+                    <a:pt x="3766104" y="3104671"/>
+                  </a:lnTo>
+                  <a:lnTo>
+                    <a:pt x="3837726" y="3113205"/>
+                  </a:lnTo>
+                  <a:lnTo>
+                    <a:pt x="3909349" y="3121547"/>
                   </a:lnTo>
                 </a:path>
               </a:pathLst>
@@ -3611,309 +3611,309 @@
           </p:nvSpPr>
           <p:spPr>
             <a:xfrm>
-              <a:off x="1172049" y="2114710"/>
-              <a:ext cx="7090630" cy="3397580"/>
+              <a:off x="1172049" y="2106163"/>
+              <a:ext cx="7090630" cy="3403999"/>
             </a:xfrm>
             <a:custGeom>
               <a:avLst/>
               <a:pathLst>
-                <a:path w="7090630" h="3397580">
+                <a:path w="7090630" h="3403999">
                   <a:moveTo>
-                    <a:pt x="7090630" y="3397580"/>
+                    <a:pt x="7090630" y="3403999"/>
                   </a:moveTo>
                   <a:lnTo>
-                    <a:pt x="7019007" y="3393860"/>
-                  </a:lnTo>
-                  <a:lnTo>
-                    <a:pt x="6947385" y="3389831"/>
-                  </a:lnTo>
-                  <a:lnTo>
-                    <a:pt x="6875762" y="3385469"/>
-                  </a:lnTo>
-                  <a:lnTo>
-                    <a:pt x="6804139" y="3380746"/>
-                  </a:lnTo>
-                  <a:lnTo>
-                    <a:pt x="6732517" y="3375633"/>
-                  </a:lnTo>
-                  <a:lnTo>
-                    <a:pt x="6660894" y="3370096"/>
-                  </a:lnTo>
-                  <a:lnTo>
-                    <a:pt x="6589272" y="3364100"/>
-                  </a:lnTo>
-                  <a:lnTo>
-                    <a:pt x="6517649" y="3357609"/>
-                  </a:lnTo>
-                  <a:lnTo>
-                    <a:pt x="6446027" y="3350581"/>
-                  </a:lnTo>
-                  <a:lnTo>
-                    <a:pt x="6374404" y="3342970"/>
-                  </a:lnTo>
-                  <a:lnTo>
-                    <a:pt x="6302782" y="3334730"/>
-                  </a:lnTo>
-                  <a:lnTo>
-                    <a:pt x="6231159" y="3325808"/>
-                  </a:lnTo>
-                  <a:lnTo>
-                    <a:pt x="6159537" y="3316148"/>
-                  </a:lnTo>
-                  <a:lnTo>
-                    <a:pt x="6087914" y="3305688"/>
-                  </a:lnTo>
-                  <a:lnTo>
-                    <a:pt x="6016292" y="3294363"/>
-                  </a:lnTo>
-                  <a:lnTo>
-                    <a:pt x="5944669" y="3282101"/>
-                  </a:lnTo>
-                  <a:lnTo>
-                    <a:pt x="5873047" y="3268823"/>
-                  </a:lnTo>
-                  <a:lnTo>
-                    <a:pt x="5801424" y="3254447"/>
-                  </a:lnTo>
-                  <a:lnTo>
-                    <a:pt x="5729802" y="3238881"/>
-                  </a:lnTo>
-                  <a:lnTo>
-                    <a:pt x="5658179" y="3222027"/>
-                  </a:lnTo>
-                  <a:lnTo>
-                    <a:pt x="5586557" y="3203778"/>
-                  </a:lnTo>
-                  <a:lnTo>
-                    <a:pt x="5514934" y="3184019"/>
-                  </a:lnTo>
-                  <a:lnTo>
-                    <a:pt x="5443311" y="3162625"/>
-                  </a:lnTo>
-                  <a:lnTo>
-                    <a:pt x="5371689" y="3139460"/>
-                  </a:lnTo>
-                  <a:lnTo>
-                    <a:pt x="5300066" y="3114378"/>
-                  </a:lnTo>
-                  <a:lnTo>
-                    <a:pt x="5228444" y="3087221"/>
-                  </a:lnTo>
-                  <a:lnTo>
-                    <a:pt x="5156821" y="3057816"/>
-                  </a:lnTo>
-                  <a:lnTo>
-                    <a:pt x="5085199" y="3025977"/>
-                  </a:lnTo>
-                  <a:lnTo>
-                    <a:pt x="5013576" y="2991504"/>
-                  </a:lnTo>
-                  <a:lnTo>
-                    <a:pt x="4941954" y="2954178"/>
-                  </a:lnTo>
-                  <a:lnTo>
-                    <a:pt x="4870331" y="2913762"/>
-                  </a:lnTo>
-                  <a:lnTo>
-                    <a:pt x="4798709" y="2870003"/>
-                  </a:lnTo>
-                  <a:lnTo>
-                    <a:pt x="4727086" y="2822621"/>
-                  </a:lnTo>
-                  <a:lnTo>
-                    <a:pt x="4655464" y="2771319"/>
-                  </a:lnTo>
-                  <a:lnTo>
-                    <a:pt x="4583841" y="2715771"/>
-                  </a:lnTo>
-                  <a:lnTo>
-                    <a:pt x="4512219" y="2655626"/>
-                  </a:lnTo>
-                  <a:lnTo>
-                    <a:pt x="4440596" y="2606657"/>
-                  </a:lnTo>
-                  <a:lnTo>
-                    <a:pt x="4368974" y="2587354"/>
-                  </a:lnTo>
-                  <a:lnTo>
-                    <a:pt x="4297351" y="2567605"/>
-                  </a:lnTo>
-                  <a:lnTo>
-                    <a:pt x="4225729" y="2547400"/>
-                  </a:lnTo>
-                  <a:lnTo>
-                    <a:pt x="4154106" y="2526729"/>
-                  </a:lnTo>
-                  <a:lnTo>
-                    <a:pt x="4082483" y="2505580"/>
-                  </a:lnTo>
-                  <a:lnTo>
-                    <a:pt x="4010861" y="2483943"/>
-                  </a:lnTo>
-                  <a:lnTo>
-                    <a:pt x="3939238" y="2461806"/>
-                  </a:lnTo>
-                  <a:lnTo>
-                    <a:pt x="3867616" y="2439158"/>
-                  </a:lnTo>
-                  <a:lnTo>
-                    <a:pt x="3795993" y="2415987"/>
-                  </a:lnTo>
-                  <a:lnTo>
-                    <a:pt x="3724371" y="2392281"/>
-                  </a:lnTo>
-                  <a:lnTo>
-                    <a:pt x="3652748" y="2368028"/>
-                  </a:lnTo>
-                  <a:lnTo>
-                    <a:pt x="3581126" y="2343214"/>
-                  </a:lnTo>
-                  <a:lnTo>
-                    <a:pt x="3509503" y="2317828"/>
-                  </a:lnTo>
-                  <a:lnTo>
-                    <a:pt x="3437881" y="2291855"/>
-                  </a:lnTo>
-                  <a:lnTo>
-                    <a:pt x="3366258" y="2265282"/>
-                  </a:lnTo>
-                  <a:lnTo>
-                    <a:pt x="3294636" y="2238096"/>
-                  </a:lnTo>
-                  <a:lnTo>
-                    <a:pt x="3223013" y="2210282"/>
-                  </a:lnTo>
-                  <a:lnTo>
-                    <a:pt x="3151391" y="2181826"/>
-                  </a:lnTo>
-                  <a:lnTo>
-                    <a:pt x="3079768" y="2152712"/>
-                  </a:lnTo>
-                  <a:lnTo>
-                    <a:pt x="3008146" y="2122926"/>
-                  </a:lnTo>
-                  <a:lnTo>
-                    <a:pt x="2936523" y="2092453"/>
-                  </a:lnTo>
-                  <a:lnTo>
-                    <a:pt x="2864901" y="2061275"/>
-                  </a:lnTo>
-                  <a:lnTo>
-                    <a:pt x="2793278" y="2029378"/>
-                  </a:lnTo>
-                  <a:lnTo>
-                    <a:pt x="2721655" y="1996744"/>
-                  </a:lnTo>
-                  <a:lnTo>
-                    <a:pt x="2650033" y="1963357"/>
-                  </a:lnTo>
-                  <a:lnTo>
-                    <a:pt x="2578410" y="1929198"/>
-                  </a:lnTo>
-                  <a:lnTo>
-                    <a:pt x="2506788" y="1894251"/>
-                  </a:lnTo>
-                  <a:lnTo>
-                    <a:pt x="2435165" y="1858496"/>
-                  </a:lnTo>
-                  <a:lnTo>
-                    <a:pt x="2363543" y="1821916"/>
-                  </a:lnTo>
-                  <a:lnTo>
-                    <a:pt x="2291920" y="1784491"/>
-                  </a:lnTo>
-                  <a:lnTo>
-                    <a:pt x="2220298" y="1746202"/>
-                  </a:lnTo>
-                  <a:lnTo>
-                    <a:pt x="2148675" y="1707029"/>
-                  </a:lnTo>
-                  <a:lnTo>
-                    <a:pt x="2077053" y="1666951"/>
-                  </a:lnTo>
-                  <a:lnTo>
-                    <a:pt x="2005430" y="1625947"/>
-                  </a:lnTo>
-                  <a:lnTo>
-                    <a:pt x="1933808" y="1583997"/>
-                  </a:lnTo>
-                  <a:lnTo>
-                    <a:pt x="1862185" y="1541078"/>
-                  </a:lnTo>
-                  <a:lnTo>
-                    <a:pt x="1790563" y="1497168"/>
-                  </a:lnTo>
-                  <a:lnTo>
-                    <a:pt x="1718940" y="1452244"/>
-                  </a:lnTo>
-                  <a:lnTo>
-                    <a:pt x="1647318" y="1406282"/>
-                  </a:lnTo>
-                  <a:lnTo>
-                    <a:pt x="1575695" y="1359259"/>
-                  </a:lnTo>
-                  <a:lnTo>
-                    <a:pt x="1504073" y="1311150"/>
-                  </a:lnTo>
-                  <a:lnTo>
-                    <a:pt x="1432450" y="1261930"/>
-                  </a:lnTo>
-                  <a:lnTo>
-                    <a:pt x="1360827" y="1211574"/>
-                  </a:lnTo>
-                  <a:lnTo>
-                    <a:pt x="1289205" y="1160054"/>
-                  </a:lnTo>
-                  <a:lnTo>
-                    <a:pt x="1217582" y="1107345"/>
-                  </a:lnTo>
-                  <a:lnTo>
-                    <a:pt x="1145960" y="1053419"/>
-                  </a:lnTo>
-                  <a:lnTo>
-                    <a:pt x="1074337" y="998247"/>
-                  </a:lnTo>
-                  <a:lnTo>
-                    <a:pt x="1002715" y="941801"/>
-                  </a:lnTo>
-                  <a:lnTo>
-                    <a:pt x="931092" y="884052"/>
-                  </a:lnTo>
-                  <a:lnTo>
-                    <a:pt x="859470" y="824969"/>
-                  </a:lnTo>
-                  <a:lnTo>
-                    <a:pt x="787847" y="764522"/>
-                  </a:lnTo>
-                  <a:lnTo>
-                    <a:pt x="716225" y="702679"/>
-                  </a:lnTo>
-                  <a:lnTo>
-                    <a:pt x="644602" y="639408"/>
-                  </a:lnTo>
-                  <a:lnTo>
-                    <a:pt x="572980" y="574676"/>
-                  </a:lnTo>
-                  <a:lnTo>
-                    <a:pt x="501357" y="508448"/>
-                  </a:lnTo>
-                  <a:lnTo>
-                    <a:pt x="429735" y="440692"/>
-                  </a:lnTo>
-                  <a:lnTo>
-                    <a:pt x="358112" y="371371"/>
-                  </a:lnTo>
-                  <a:lnTo>
-                    <a:pt x="286490" y="300448"/>
-                  </a:lnTo>
-                  <a:lnTo>
-                    <a:pt x="214867" y="227889"/>
-                  </a:lnTo>
-                  <a:lnTo>
-                    <a:pt x="143245" y="153653"/>
-                  </a:lnTo>
-                  <a:lnTo>
-                    <a:pt x="71622" y="77703"/>
+                    <a:pt x="7019007" y="3400137"/>
+                  </a:lnTo>
+                  <a:lnTo>
+                    <a:pt x="6947385" y="3395957"/>
+                  </a:lnTo>
+                  <a:lnTo>
+                    <a:pt x="6875762" y="3391435"/>
+                  </a:lnTo>
+                  <a:lnTo>
+                    <a:pt x="6804139" y="3386542"/>
+                  </a:lnTo>
+                  <a:lnTo>
+                    <a:pt x="6732517" y="3381248"/>
+                  </a:lnTo>
+                  <a:lnTo>
+                    <a:pt x="6660894" y="3375519"/>
+                  </a:lnTo>
+                  <a:lnTo>
+                    <a:pt x="6589272" y="3369321"/>
+                  </a:lnTo>
+                  <a:lnTo>
+                    <a:pt x="6517649" y="3362614"/>
+                  </a:lnTo>
+                  <a:lnTo>
+                    <a:pt x="6446027" y="3355357"/>
+                  </a:lnTo>
+                  <a:lnTo>
+                    <a:pt x="6374404" y="3347504"/>
+                  </a:lnTo>
+                  <a:lnTo>
+                    <a:pt x="6302782" y="3339008"/>
+                  </a:lnTo>
+                  <a:lnTo>
+                    <a:pt x="6231159" y="3329814"/>
+                  </a:lnTo>
+                  <a:lnTo>
+                    <a:pt x="6159537" y="3319866"/>
+                  </a:lnTo>
+                  <a:lnTo>
+                    <a:pt x="6087914" y="3309103"/>
+                  </a:lnTo>
+                  <a:lnTo>
+                    <a:pt x="6016292" y="3297456"/>
+                  </a:lnTo>
+                  <a:lnTo>
+                    <a:pt x="5944669" y="3284854"/>
+                  </a:lnTo>
+                  <a:lnTo>
+                    <a:pt x="5873047" y="3271219"/>
+                  </a:lnTo>
+                  <a:lnTo>
+                    <a:pt x="5801424" y="3256465"/>
+                  </a:lnTo>
+                  <a:lnTo>
+                    <a:pt x="5729802" y="3240500"/>
+                  </a:lnTo>
+                  <a:lnTo>
+                    <a:pt x="5658179" y="3223227"/>
+                  </a:lnTo>
+                  <a:lnTo>
+                    <a:pt x="5586557" y="3204536"/>
+                  </a:lnTo>
+                  <a:lnTo>
+                    <a:pt x="5514934" y="3184312"/>
+                  </a:lnTo>
+                  <a:lnTo>
+                    <a:pt x="5443311" y="3162429"/>
+                  </a:lnTo>
+                  <a:lnTo>
+                    <a:pt x="5371689" y="3138751"/>
+                  </a:lnTo>
+                  <a:lnTo>
+                    <a:pt x="5300066" y="3113131"/>
+                  </a:lnTo>
+                  <a:lnTo>
+                    <a:pt x="5228444" y="3085410"/>
+                  </a:lnTo>
+                  <a:lnTo>
+                    <a:pt x="5156821" y="3055414"/>
+                  </a:lnTo>
+                  <a:lnTo>
+                    <a:pt x="5085199" y="3022958"/>
+                  </a:lnTo>
+                  <a:lnTo>
+                    <a:pt x="5013576" y="2987840"/>
+                  </a:lnTo>
+                  <a:lnTo>
+                    <a:pt x="4941954" y="2949841"/>
+                  </a:lnTo>
+                  <a:lnTo>
+                    <a:pt x="4870331" y="2908725"/>
+                  </a:lnTo>
+                  <a:lnTo>
+                    <a:pt x="4798709" y="2864236"/>
+                  </a:lnTo>
+                  <a:lnTo>
+                    <a:pt x="4727086" y="2816099"/>
+                  </a:lnTo>
+                  <a:lnTo>
+                    <a:pt x="4655464" y="2764012"/>
+                  </a:lnTo>
+                  <a:lnTo>
+                    <a:pt x="4583841" y="2707653"/>
+                  </a:lnTo>
+                  <a:lnTo>
+                    <a:pt x="4512219" y="2646671"/>
+                  </a:lnTo>
+                  <a:lnTo>
+                    <a:pt x="4440596" y="2610001"/>
+                  </a:lnTo>
+                  <a:lnTo>
+                    <a:pt x="4368974" y="2590630"/>
+                  </a:lnTo>
+                  <a:lnTo>
+                    <a:pt x="4297351" y="2570812"/>
+                  </a:lnTo>
+                  <a:lnTo>
+                    <a:pt x="4225729" y="2550538"/>
+                  </a:lnTo>
+                  <a:lnTo>
+                    <a:pt x="4154106" y="2529797"/>
+                  </a:lnTo>
+                  <a:lnTo>
+                    <a:pt x="4082483" y="2508579"/>
+                  </a:lnTo>
+                  <a:lnTo>
+                    <a:pt x="4010861" y="2486871"/>
+                  </a:lnTo>
+                  <a:lnTo>
+                    <a:pt x="3939238" y="2464664"/>
+                  </a:lnTo>
+                  <a:lnTo>
+                    <a:pt x="3867616" y="2441946"/>
+                  </a:lnTo>
+                  <a:lnTo>
+                    <a:pt x="3795993" y="2418704"/>
+                  </a:lnTo>
+                  <a:lnTo>
+                    <a:pt x="3724371" y="2394926"/>
+                  </a:lnTo>
+                  <a:lnTo>
+                    <a:pt x="3652748" y="2370602"/>
+                  </a:lnTo>
+                  <a:lnTo>
+                    <a:pt x="3581126" y="2345716"/>
+                  </a:lnTo>
+                  <a:lnTo>
+                    <a:pt x="3509503" y="2320258"/>
+                  </a:lnTo>
+                  <a:lnTo>
+                    <a:pt x="3437881" y="2294214"/>
+                  </a:lnTo>
+                  <a:lnTo>
+                    <a:pt x="3366258" y="2267569"/>
+                  </a:lnTo>
+                  <a:lnTo>
+                    <a:pt x="3294636" y="2240311"/>
+                  </a:lnTo>
+                  <a:lnTo>
+                    <a:pt x="3223013" y="2212425"/>
+                  </a:lnTo>
+                  <a:lnTo>
+                    <a:pt x="3151391" y="2183897"/>
+                  </a:lnTo>
+                  <a:lnTo>
+                    <a:pt x="3079768" y="2154712"/>
+                  </a:lnTo>
+                  <a:lnTo>
+                    <a:pt x="3008146" y="2124855"/>
+                  </a:lnTo>
+                  <a:lnTo>
+                    <a:pt x="2936523" y="2094310"/>
+                  </a:lnTo>
+                  <a:lnTo>
+                    <a:pt x="2864901" y="2063061"/>
+                  </a:lnTo>
+                  <a:lnTo>
+                    <a:pt x="2793278" y="2031093"/>
+                  </a:lnTo>
+                  <a:lnTo>
+                    <a:pt x="2721655" y="1998389"/>
+                  </a:lnTo>
+                  <a:lnTo>
+                    <a:pt x="2650033" y="1964931"/>
+                  </a:lnTo>
+                  <a:lnTo>
+                    <a:pt x="2578410" y="1930703"/>
+                  </a:lnTo>
+                  <a:lnTo>
+                    <a:pt x="2506788" y="1895686"/>
+                  </a:lnTo>
+                  <a:lnTo>
+                    <a:pt x="2435165" y="1859863"/>
+                  </a:lnTo>
+                  <a:lnTo>
+                    <a:pt x="2363543" y="1823215"/>
+                  </a:lnTo>
+                  <a:lnTo>
+                    <a:pt x="2291920" y="1785723"/>
+                  </a:lnTo>
+                  <a:lnTo>
+                    <a:pt x="2220298" y="1747367"/>
+                  </a:lnTo>
+                  <a:lnTo>
+                    <a:pt x="2148675" y="1708128"/>
+                  </a:lnTo>
+                  <a:lnTo>
+                    <a:pt x="2077053" y="1667986"/>
+                  </a:lnTo>
+                  <a:lnTo>
+                    <a:pt x="2005430" y="1626918"/>
+                  </a:lnTo>
+                  <a:lnTo>
+                    <a:pt x="1933808" y="1584905"/>
+                  </a:lnTo>
+                  <a:lnTo>
+                    <a:pt x="1862185" y="1541924"/>
+                  </a:lnTo>
+                  <a:lnTo>
+                    <a:pt x="1790563" y="1497954"/>
+                  </a:lnTo>
+                  <a:lnTo>
+                    <a:pt x="1718940" y="1452970"/>
+                  </a:lnTo>
+                  <a:lnTo>
+                    <a:pt x="1647318" y="1406951"/>
+                  </a:lnTo>
+                  <a:lnTo>
+                    <a:pt x="1575695" y="1359872"/>
+                  </a:lnTo>
+                  <a:lnTo>
+                    <a:pt x="1504073" y="1311708"/>
+                  </a:lnTo>
+                  <a:lnTo>
+                    <a:pt x="1432450" y="1262435"/>
+                  </a:lnTo>
+                  <a:lnTo>
+                    <a:pt x="1360827" y="1212027"/>
+                  </a:lnTo>
+                  <a:lnTo>
+                    <a:pt x="1289205" y="1160459"/>
+                  </a:lnTo>
+                  <a:lnTo>
+                    <a:pt x="1217582" y="1107702"/>
+                  </a:lnTo>
+                  <a:lnTo>
+                    <a:pt x="1145960" y="1053731"/>
+                  </a:lnTo>
+                  <a:lnTo>
+                    <a:pt x="1074337" y="998516"/>
+                  </a:lnTo>
+                  <a:lnTo>
+                    <a:pt x="1002715" y="942030"/>
+                  </a:lnTo>
+                  <a:lnTo>
+                    <a:pt x="931092" y="884243"/>
+                  </a:lnTo>
+                  <a:lnTo>
+                    <a:pt x="859470" y="825125"/>
+                  </a:lnTo>
+                  <a:lnTo>
+                    <a:pt x="787847" y="764646"/>
+                  </a:lnTo>
+                  <a:lnTo>
+                    <a:pt x="716225" y="702773"/>
+                  </a:lnTo>
+                  <a:lnTo>
+                    <a:pt x="644602" y="639476"/>
+                  </a:lnTo>
+                  <a:lnTo>
+                    <a:pt x="572980" y="574720"/>
+                  </a:lnTo>
+                  <a:lnTo>
+                    <a:pt x="501357" y="508473"/>
+                  </a:lnTo>
+                  <a:lnTo>
+                    <a:pt x="429735" y="440701"/>
+                  </a:lnTo>
+                  <a:lnTo>
+                    <a:pt x="358112" y="371368"/>
+                  </a:lnTo>
+                  <a:lnTo>
+                    <a:pt x="286490" y="300437"/>
+                  </a:lnTo>
+                  <a:lnTo>
+                    <a:pt x="214867" y="227873"/>
+                  </a:lnTo>
+                  <a:lnTo>
+                    <a:pt x="143245" y="153638"/>
+                  </a:lnTo>
+                  <a:lnTo>
+                    <a:pt x="71622" y="77693"/>
                   </a:lnTo>
                   <a:lnTo>
                     <a:pt x="0" y="0"/>
@@ -3936,210 +3936,210 @@
           </p:nvSpPr>
           <p:spPr>
             <a:xfrm>
-              <a:off x="3628537" y="2073503"/>
-              <a:ext cx="4634141" cy="3356674"/>
+              <a:off x="3633654" y="2073503"/>
+              <a:ext cx="4629025" cy="3353152"/>
             </a:xfrm>
             <a:custGeom>
               <a:avLst/>
               <a:pathLst>
-                <a:path w="4634141" h="3356674">
+                <a:path w="4629025" h="3353152">
                   <a:moveTo>
                     <a:pt x="0" y="0"/>
                   </a:moveTo>
                   <a:lnTo>
-                    <a:pt x="50299" y="123884"/>
-                  </a:lnTo>
-                  <a:lnTo>
-                    <a:pt x="121922" y="291484"/>
-                  </a:lnTo>
-                  <a:lnTo>
-                    <a:pt x="193544" y="450724"/>
-                  </a:lnTo>
-                  <a:lnTo>
-                    <a:pt x="265167" y="602021"/>
-                  </a:lnTo>
-                  <a:lnTo>
-                    <a:pt x="336790" y="745770"/>
-                  </a:lnTo>
-                  <a:lnTo>
-                    <a:pt x="408412" y="882349"/>
-                  </a:lnTo>
-                  <a:lnTo>
-                    <a:pt x="480035" y="1012115"/>
-                  </a:lnTo>
-                  <a:lnTo>
-                    <a:pt x="551657" y="1135407"/>
-                  </a:lnTo>
-                  <a:lnTo>
-                    <a:pt x="623280" y="1252550"/>
-                  </a:lnTo>
-                  <a:lnTo>
-                    <a:pt x="694902" y="1363849"/>
-                  </a:lnTo>
-                  <a:lnTo>
-                    <a:pt x="766525" y="1469596"/>
-                  </a:lnTo>
-                  <a:lnTo>
-                    <a:pt x="838147" y="1570068"/>
-                  </a:lnTo>
-                  <a:lnTo>
-                    <a:pt x="909770" y="1665528"/>
-                  </a:lnTo>
-                  <a:lnTo>
-                    <a:pt x="981392" y="1756227"/>
-                  </a:lnTo>
-                  <a:lnTo>
-                    <a:pt x="1053015" y="1842401"/>
-                  </a:lnTo>
-                  <a:lnTo>
-                    <a:pt x="1124637" y="1924276"/>
-                  </a:lnTo>
-                  <a:lnTo>
-                    <a:pt x="1196260" y="2002067"/>
-                  </a:lnTo>
-                  <a:lnTo>
-                    <a:pt x="1267882" y="2075978"/>
-                  </a:lnTo>
-                  <a:lnTo>
-                    <a:pt x="1339505" y="2146202"/>
-                  </a:lnTo>
-                  <a:lnTo>
-                    <a:pt x="1411127" y="2212923"/>
-                  </a:lnTo>
-                  <a:lnTo>
-                    <a:pt x="1482750" y="2276315"/>
-                  </a:lnTo>
-                  <a:lnTo>
-                    <a:pt x="1554372" y="2336546"/>
-                  </a:lnTo>
-                  <a:lnTo>
-                    <a:pt x="1625995" y="2393772"/>
-                  </a:lnTo>
-                  <a:lnTo>
-                    <a:pt x="1697618" y="2448143"/>
-                  </a:lnTo>
-                  <a:lnTo>
-                    <a:pt x="1769240" y="2499802"/>
-                  </a:lnTo>
-                  <a:lnTo>
-                    <a:pt x="1840863" y="2548884"/>
-                  </a:lnTo>
-                  <a:lnTo>
-                    <a:pt x="1912485" y="2595518"/>
-                  </a:lnTo>
-                  <a:lnTo>
-                    <a:pt x="1984108" y="2639826"/>
-                  </a:lnTo>
-                  <a:lnTo>
-                    <a:pt x="2055730" y="2681923"/>
-                  </a:lnTo>
-                  <a:lnTo>
-                    <a:pt x="2127353" y="2721921"/>
-                  </a:lnTo>
-                  <a:lnTo>
-                    <a:pt x="2198975" y="2759923"/>
-                  </a:lnTo>
-                  <a:lnTo>
-                    <a:pt x="2270598" y="2796029"/>
-                  </a:lnTo>
-                  <a:lnTo>
-                    <a:pt x="2342220" y="2830335"/>
-                  </a:lnTo>
-                  <a:lnTo>
-                    <a:pt x="2413843" y="2862929"/>
-                  </a:lnTo>
-                  <a:lnTo>
-                    <a:pt x="2485465" y="2893897"/>
-                  </a:lnTo>
-                  <a:lnTo>
-                    <a:pt x="2557088" y="2923321"/>
-                  </a:lnTo>
-                  <a:lnTo>
-                    <a:pt x="2628710" y="2951277"/>
-                  </a:lnTo>
-                  <a:lnTo>
-                    <a:pt x="2700333" y="2977838"/>
-                  </a:lnTo>
-                  <a:lnTo>
-                    <a:pt x="2771955" y="3003074"/>
-                  </a:lnTo>
-                  <a:lnTo>
-                    <a:pt x="2843578" y="3027052"/>
-                  </a:lnTo>
-                  <a:lnTo>
-                    <a:pt x="2915200" y="3049833"/>
-                  </a:lnTo>
-                  <a:lnTo>
-                    <a:pt x="2986823" y="3071478"/>
-                  </a:lnTo>
-                  <a:lnTo>
-                    <a:pt x="3058446" y="3092043"/>
-                  </a:lnTo>
-                  <a:lnTo>
-                    <a:pt x="3130068" y="3111583"/>
-                  </a:lnTo>
-                  <a:lnTo>
-                    <a:pt x="3201691" y="3130147"/>
-                  </a:lnTo>
-                  <a:lnTo>
-                    <a:pt x="3273313" y="3147786"/>
-                  </a:lnTo>
-                  <a:lnTo>
-                    <a:pt x="3344936" y="3164545"/>
-                  </a:lnTo>
-                  <a:lnTo>
-                    <a:pt x="3416558" y="3180467"/>
-                  </a:lnTo>
-                  <a:lnTo>
-                    <a:pt x="3488181" y="3195596"/>
-                  </a:lnTo>
-                  <a:lnTo>
-                    <a:pt x="3559803" y="3209970"/>
-                  </a:lnTo>
-                  <a:lnTo>
-                    <a:pt x="3631426" y="3223627"/>
-                  </a:lnTo>
-                  <a:lnTo>
-                    <a:pt x="3703048" y="3236602"/>
-                  </a:lnTo>
-                  <a:lnTo>
-                    <a:pt x="3774671" y="3248930"/>
-                  </a:lnTo>
-                  <a:lnTo>
-                    <a:pt x="3846293" y="3260644"/>
-                  </a:lnTo>
-                  <a:lnTo>
-                    <a:pt x="3917916" y="3271773"/>
-                  </a:lnTo>
-                  <a:lnTo>
-                    <a:pt x="3989538" y="3282347"/>
-                  </a:lnTo>
-                  <a:lnTo>
-                    <a:pt x="4061161" y="3292393"/>
-                  </a:lnTo>
-                  <a:lnTo>
-                    <a:pt x="4132783" y="3301939"/>
-                  </a:lnTo>
-                  <a:lnTo>
-                    <a:pt x="4204406" y="3311008"/>
-                  </a:lnTo>
-                  <a:lnTo>
-                    <a:pt x="4276028" y="3319624"/>
-                  </a:lnTo>
-                  <a:lnTo>
-                    <a:pt x="4347651" y="3327811"/>
-                  </a:lnTo>
-                  <a:lnTo>
-                    <a:pt x="4419274" y="3335590"/>
-                  </a:lnTo>
-                  <a:lnTo>
-                    <a:pt x="4490896" y="3342980"/>
-                  </a:lnTo>
-                  <a:lnTo>
-                    <a:pt x="4562519" y="3350002"/>
-                  </a:lnTo>
-                  <a:lnTo>
-                    <a:pt x="4634141" y="3356674"/>
+                    <a:pt x="45183" y="110892"/>
+                  </a:lnTo>
+                  <a:lnTo>
+                    <a:pt x="116806" y="277965"/>
+                  </a:lnTo>
+                  <a:lnTo>
+                    <a:pt x="188428" y="436761"/>
+                  </a:lnTo>
+                  <a:lnTo>
+                    <a:pt x="260051" y="587692"/>
+                  </a:lnTo>
+                  <a:lnTo>
+                    <a:pt x="331673" y="731147"/>
+                  </a:lnTo>
+                  <a:lnTo>
+                    <a:pt x="403296" y="867496"/>
+                  </a:lnTo>
+                  <a:lnTo>
+                    <a:pt x="474918" y="997090"/>
+                  </a:lnTo>
+                  <a:lnTo>
+                    <a:pt x="546541" y="1120266"/>
+                  </a:lnTo>
+                  <a:lnTo>
+                    <a:pt x="618163" y="1237339"/>
+                  </a:lnTo>
+                  <a:lnTo>
+                    <a:pt x="689786" y="1348614"/>
+                  </a:lnTo>
+                  <a:lnTo>
+                    <a:pt x="761409" y="1454377"/>
+                  </a:lnTo>
+                  <a:lnTo>
+                    <a:pt x="833031" y="1554901"/>
+                  </a:lnTo>
+                  <a:lnTo>
+                    <a:pt x="904654" y="1650445"/>
+                  </a:lnTo>
+                  <a:lnTo>
+                    <a:pt x="976276" y="1741257"/>
+                  </a:lnTo>
+                  <a:lnTo>
+                    <a:pt x="1047899" y="1827570"/>
+                  </a:lnTo>
+                  <a:lnTo>
+                    <a:pt x="1119521" y="1909608"/>
+                  </a:lnTo>
+                  <a:lnTo>
+                    <a:pt x="1191144" y="1987582"/>
+                  </a:lnTo>
+                  <a:lnTo>
+                    <a:pt x="1262766" y="2061694"/>
+                  </a:lnTo>
+                  <a:lnTo>
+                    <a:pt x="1334389" y="2132135"/>
+                  </a:lnTo>
+                  <a:lnTo>
+                    <a:pt x="1406011" y="2199086"/>
+                  </a:lnTo>
+                  <a:lnTo>
+                    <a:pt x="1477634" y="2262721"/>
+                  </a:lnTo>
+                  <a:lnTo>
+                    <a:pt x="1549256" y="2323204"/>
+                  </a:lnTo>
+                  <a:lnTo>
+                    <a:pt x="1620879" y="2380691"/>
+                  </a:lnTo>
+                  <a:lnTo>
+                    <a:pt x="1692501" y="2435330"/>
+                  </a:lnTo>
+                  <a:lnTo>
+                    <a:pt x="1764124" y="2487263"/>
+                  </a:lnTo>
+                  <a:lnTo>
+                    <a:pt x="1835746" y="2536623"/>
+                  </a:lnTo>
+                  <a:lnTo>
+                    <a:pt x="1907369" y="2583539"/>
+                  </a:lnTo>
+                  <a:lnTo>
+                    <a:pt x="1978991" y="2628130"/>
+                  </a:lnTo>
+                  <a:lnTo>
+                    <a:pt x="2050614" y="2670513"/>
+                  </a:lnTo>
+                  <a:lnTo>
+                    <a:pt x="2122237" y="2710796"/>
+                  </a:lnTo>
+                  <a:lnTo>
+                    <a:pt x="2193859" y="2749083"/>
+                  </a:lnTo>
+                  <a:lnTo>
+                    <a:pt x="2265482" y="2785475"/>
+                  </a:lnTo>
+                  <a:lnTo>
+                    <a:pt x="2337104" y="2820063"/>
+                  </a:lnTo>
+                  <a:lnTo>
+                    <a:pt x="2408727" y="2852938"/>
+                  </a:lnTo>
+                  <a:lnTo>
+                    <a:pt x="2480349" y="2884185"/>
+                  </a:lnTo>
+                  <a:lnTo>
+                    <a:pt x="2551972" y="2913884"/>
+                  </a:lnTo>
+                  <a:lnTo>
+                    <a:pt x="2623594" y="2942112"/>
+                  </a:lnTo>
+                  <a:lnTo>
+                    <a:pt x="2695217" y="2968942"/>
+                  </a:lnTo>
+                  <a:lnTo>
+                    <a:pt x="2766839" y="2994442"/>
+                  </a:lnTo>
+                  <a:lnTo>
+                    <a:pt x="2838462" y="3018680"/>
+                  </a:lnTo>
+                  <a:lnTo>
+                    <a:pt x="2910084" y="3041716"/>
+                  </a:lnTo>
+                  <a:lnTo>
+                    <a:pt x="2981707" y="3063612"/>
+                  </a:lnTo>
+                  <a:lnTo>
+                    <a:pt x="3053329" y="3084423"/>
+                  </a:lnTo>
+                  <a:lnTo>
+                    <a:pt x="3124952" y="3104204"/>
+                  </a:lnTo>
+                  <a:lnTo>
+                    <a:pt x="3196574" y="3123004"/>
+                  </a:lnTo>
+                  <a:lnTo>
+                    <a:pt x="3268197" y="3140873"/>
+                  </a:lnTo>
+                  <a:lnTo>
+                    <a:pt x="3339819" y="3157857"/>
+                  </a:lnTo>
+                  <a:lnTo>
+                    <a:pt x="3411442" y="3174000"/>
+                  </a:lnTo>
+                  <a:lnTo>
+                    <a:pt x="3483065" y="3189343"/>
+                  </a:lnTo>
+                  <a:lnTo>
+                    <a:pt x="3554687" y="3203926"/>
+                  </a:lnTo>
+                  <a:lnTo>
+                    <a:pt x="3626310" y="3217787"/>
+                  </a:lnTo>
+                  <a:lnTo>
+                    <a:pt x="3697932" y="3230961"/>
+                  </a:lnTo>
+                  <a:lnTo>
+                    <a:pt x="3769555" y="3243483"/>
+                  </a:lnTo>
+                  <a:lnTo>
+                    <a:pt x="3841177" y="3255384"/>
+                  </a:lnTo>
+                  <a:lnTo>
+                    <a:pt x="3912800" y="3266696"/>
+                  </a:lnTo>
+                  <a:lnTo>
+                    <a:pt x="3984422" y="3277447"/>
+                  </a:lnTo>
+                  <a:lnTo>
+                    <a:pt x="4056045" y="3287666"/>
+                  </a:lnTo>
+                  <a:lnTo>
+                    <a:pt x="4127667" y="3297379"/>
+                  </a:lnTo>
+                  <a:lnTo>
+                    <a:pt x="4199290" y="3306611"/>
+                  </a:lnTo>
+                  <a:lnTo>
+                    <a:pt x="4270912" y="3315385"/>
+                  </a:lnTo>
+                  <a:lnTo>
+                    <a:pt x="4342535" y="3323725"/>
+                  </a:lnTo>
+                  <a:lnTo>
+                    <a:pt x="4414157" y="3331651"/>
+                  </a:lnTo>
+                  <a:lnTo>
+                    <a:pt x="4485780" y="3339185"/>
+                  </a:lnTo>
+                  <a:lnTo>
+                    <a:pt x="4557402" y="3346346"/>
+                  </a:lnTo>
+                  <a:lnTo>
+                    <a:pt x="4629025" y="3353152"/>
                   </a:lnTo>
                 </a:path>
               </a:pathLst>
@@ -4211,7 +4211,7 @@
           </p:nvSpPr>
           <p:spPr>
             <a:xfrm>
-              <a:off x="5636831" y="2073503"/>
+              <a:off x="5656410" y="2073503"/>
               <a:ext cx="0" cy="3649639"/>
             </a:xfrm>
             <a:custGeom>
@@ -4254,7 +4254,7 @@
           </p:nvSpPr>
           <p:spPr>
             <a:xfrm>
-              <a:off x="4328179" y="2073503"/>
+              <a:off x="4335733" y="2073503"/>
               <a:ext cx="0" cy="3649639"/>
             </a:xfrm>
             <a:custGeom>
@@ -4297,7 +4297,7 @@
           </p:nvSpPr>
           <p:spPr>
             <a:xfrm>
-              <a:off x="6683624" y="2073503"/>
+              <a:off x="6684598" y="2073503"/>
               <a:ext cx="0" cy="3649639"/>
             </a:xfrm>
             <a:custGeom>
@@ -4570,7 +4570,7 @@
           </p:nvSpPr>
           <p:spPr>
             <a:xfrm>
-              <a:off x="2970385" y="5785772"/>
+              <a:off x="2971977" y="5785772"/>
               <a:ext cx="161574" cy="80101"/>
             </a:xfrm>
             <a:prstGeom prst="rect">
@@ -4616,7 +4616,7 @@
           </p:nvSpPr>
           <p:spPr>
             <a:xfrm>
-              <a:off x="5501440" y="5785772"/>
+              <a:off x="5499574" y="5785772"/>
               <a:ext cx="62179" cy="80101"/>
             </a:xfrm>
             <a:prstGeom prst="rect">
@@ -4662,7 +4662,7 @@
           </p:nvSpPr>
           <p:spPr>
             <a:xfrm>
-              <a:off x="7951708" y="5785772"/>
+              <a:off x="7946384" y="5785772"/>
               <a:ext cx="124358" cy="80101"/>
             </a:xfrm>
             <a:prstGeom prst="rect">
@@ -4833,7 +4833,7 @@
                   <a:latin typeface="Helvetica"/>
                   <a:cs typeface="Helvetica"/>
                 </a:rPr>
-                <a:t>subHR per 10 mL/min decline: 2.03 (1.37-3.01), p_Bonf = 0.002 (n = 6)  |  per IQR decline (Δ = 23.7): 5.38 (2.12-13.67)  |  IQR: [-12.1, 11.6]</a:t>
+                <a:t>subHR per 10 mL/min decline: 2.02 (1.37-2.98), p_Bonf = 0.002 (n = 6)  |  per IQR decline (Δ = 23.7): 5.29 (2.11-13.27)  |  IQR: [-12.1, 11.6]</a:t>
               </a:r>
             </a:p>
           </p:txBody>
